--- a/apresentacao/Apresentacao_Modulo_Internacao.pptx
+++ b/apresentacao/Apresentacao_Modulo_Internacao.pptx
@@ -1429,7 +1429,7 @@
               <a:buNone/>
             </a:pPr>
             <a:r>
-              <a:rPr lang="en-US" sz="4400" b="1" dirty="0">
+              <a:rPr lang="en-US" sz="4400" b="1" dirty="0" err="1">
                 <a:solidFill>
                   <a:srgbClr val="FFFFFF"/>
                 </a:solidFill>
@@ -1437,7 +1437,29 @@
                 <a:ea typeface="Cambria" pitchFamily="34" charset="-122"/>
                 <a:cs typeface="Cambria" pitchFamily="34" charset="-120"/>
               </a:rPr>
-              <a:t>Modulo de Internacao</a:t>
+              <a:t>Módulo</a:t>
+            </a:r>
+            <a:r>
+              <a:rPr lang="en-US" sz="4400" b="1" dirty="0">
+                <a:solidFill>
+                  <a:srgbClr val="FFFFFF"/>
+                </a:solidFill>
+                <a:latin typeface="Cambria" pitchFamily="34" charset="0"/>
+                <a:ea typeface="Cambria" pitchFamily="34" charset="-122"/>
+                <a:cs typeface="Cambria" pitchFamily="34" charset="-120"/>
+              </a:rPr>
+              <a:t> de </a:t>
+            </a:r>
+            <a:r>
+              <a:rPr lang="en-US" sz="4400" b="1" dirty="0" err="1">
+                <a:solidFill>
+                  <a:srgbClr val="FFFFFF"/>
+                </a:solidFill>
+                <a:latin typeface="Cambria" pitchFamily="34" charset="0"/>
+                <a:ea typeface="Cambria" pitchFamily="34" charset="-122"/>
+                <a:cs typeface="Cambria" pitchFamily="34" charset="-120"/>
+              </a:rPr>
+              <a:t>Internação</a:t>
             </a:r>
             <a:endParaRPr lang="en-US" sz="4400" dirty="0"/>
           </a:p>
@@ -2124,7 +2146,51 @@
                 <a:ea typeface="Calibri" pitchFamily="34" charset="-122"/>
                 <a:cs typeface="Calibri" pitchFamily="34" charset="-120"/>
               </a:rPr>
-              <a:t> leitos (individual, duplo, coletivo)</a:t>
+              <a:t> </a:t>
+            </a:r>
+            <a:r>
+              <a:rPr lang="en-US" sz="1200" dirty="0" err="1">
+                <a:solidFill>
+                  <a:srgbClr val="1E293B"/>
+                </a:solidFill>
+                <a:latin typeface="Calibri" pitchFamily="34" charset="0"/>
+                <a:ea typeface="Calibri" pitchFamily="34" charset="-122"/>
+                <a:cs typeface="Calibri" pitchFamily="34" charset="-120"/>
+              </a:rPr>
+              <a:t>leitos</a:t>
+            </a:r>
+            <a:r>
+              <a:rPr lang="en-US" sz="1200" dirty="0">
+                <a:solidFill>
+                  <a:srgbClr val="1E293B"/>
+                </a:solidFill>
+                <a:latin typeface="Calibri" pitchFamily="34" charset="0"/>
+                <a:ea typeface="Calibri" pitchFamily="34" charset="-122"/>
+                <a:cs typeface="Calibri" pitchFamily="34" charset="-120"/>
+              </a:rPr>
+              <a:t> (</a:t>
+            </a:r>
+            <a:r>
+              <a:rPr lang="en-US" sz="1200" dirty="0" err="1">
+                <a:solidFill>
+                  <a:srgbClr val="1E293B"/>
+                </a:solidFill>
+                <a:latin typeface="Calibri" pitchFamily="34" charset="0"/>
+                <a:ea typeface="Calibri" pitchFamily="34" charset="-122"/>
+                <a:cs typeface="Calibri" pitchFamily="34" charset="-120"/>
+              </a:rPr>
+              <a:t>coletivo</a:t>
+            </a:r>
+            <a:r>
+              <a:rPr lang="en-US" sz="1200" dirty="0">
+                <a:solidFill>
+                  <a:srgbClr val="1E293B"/>
+                </a:solidFill>
+                <a:latin typeface="Calibri" pitchFamily="34" charset="0"/>
+                <a:ea typeface="Calibri" pitchFamily="34" charset="-122"/>
+                <a:cs typeface="Calibri" pitchFamily="34" charset="-120"/>
+              </a:rPr>
+              <a:t>)</a:t>
             </a:r>
             <a:endParaRPr lang="en-US" sz="1200" dirty="0"/>
           </a:p>
@@ -2802,7 +2868,29 @@
                 <a:ea typeface="Calibri" pitchFamily="34" charset="-122"/>
                 <a:cs typeface="Calibri" pitchFamily="34" charset="-120"/>
               </a:rPr>
-              <a:t>Entidades, atributos e relacionamentos (brModelo)</a:t>
+              <a:t>Entidades, atributos e </a:t>
+            </a:r>
+            <a:r>
+              <a:rPr lang="en-US" sz="1300" i="1" dirty="0" err="1">
+                <a:solidFill>
+                  <a:srgbClr val="64748B"/>
+                </a:solidFill>
+                <a:latin typeface="Calibri" pitchFamily="34" charset="0"/>
+                <a:ea typeface="Calibri" pitchFamily="34" charset="-122"/>
+                <a:cs typeface="Calibri" pitchFamily="34" charset="-120"/>
+              </a:rPr>
+              <a:t>relacionamentos</a:t>
+            </a:r>
+            <a:r>
+              <a:rPr lang="en-US" sz="1300" i="1" dirty="0">
+                <a:solidFill>
+                  <a:srgbClr val="64748B"/>
+                </a:solidFill>
+                <a:latin typeface="Calibri" pitchFamily="34" charset="0"/>
+                <a:ea typeface="Calibri" pitchFamily="34" charset="-122"/>
+                <a:cs typeface="Calibri" pitchFamily="34" charset="-120"/>
+              </a:rPr>
+              <a:t> </a:t>
             </a:r>
             <a:endParaRPr lang="en-US" sz="1300" dirty="0"/>
           </a:p>
@@ -3226,7 +3314,7 @@
                 <a:ea typeface="Calibri" pitchFamily="34" charset="-122"/>
                 <a:cs typeface="Calibri" pitchFamily="34" charset="-120"/>
               </a:rPr>
-              <a:t>3 tabelas novas — PKs, FKs e CHECKs garantindo integridade</a:t>
+              <a:t>3 tabelas novas — PKs, FKs </a:t>
             </a:r>
             <a:endParaRPr lang="en-US" sz="1300" dirty="0"/>
           </a:p>
@@ -4092,7 +4180,29 @@
                 <a:ea typeface="Calibri" pitchFamily="34" charset="-122"/>
                 <a:cs typeface="Calibri" pitchFamily="34" charset="-120"/>
               </a:rPr>
-              <a:t>Todas as PKs usam INT4 GENERATED ALWAYS AS IDENTITY (padrao PostgreSQL atual)</a:t>
+              <a:t>Todas as PKs usam INT4 GENERATED ALWAYS AS IDENTITY (</a:t>
+            </a:r>
+            <a:r>
+              <a:rPr lang="en-US" sz="1100" i="1" dirty="0" err="1">
+                <a:solidFill>
+                  <a:srgbClr val="64748B"/>
+                </a:solidFill>
+                <a:latin typeface="Calibri" pitchFamily="34" charset="0"/>
+                <a:ea typeface="Calibri" pitchFamily="34" charset="-122"/>
+                <a:cs typeface="Calibri" pitchFamily="34" charset="-120"/>
+              </a:rPr>
+              <a:t>padrão</a:t>
+            </a:r>
+            <a:r>
+              <a:rPr lang="en-US" sz="1100" i="1" dirty="0">
+                <a:solidFill>
+                  <a:srgbClr val="64748B"/>
+                </a:solidFill>
+                <a:latin typeface="Calibri" pitchFamily="34" charset="0"/>
+                <a:ea typeface="Calibri" pitchFamily="34" charset="-122"/>
+                <a:cs typeface="Calibri" pitchFamily="34" charset="-120"/>
+              </a:rPr>
+              <a:t> PostgreSQL)</a:t>
             </a:r>
             <a:endParaRPr lang="en-US" sz="1100" dirty="0"/>
           </a:p>
@@ -4335,7 +4445,51 @@
                 <a:ea typeface="Calibri" pitchFamily="34" charset="-122"/>
                 <a:cs typeface="Calibri" pitchFamily="34" charset="-120"/>
               </a:rPr>
-              <a:t>Lista todas as internacoes em andamento (data_saida IS NULL) com nome do paciente, medico, especialidade, leito, quarto e andar — JOIN de 5 tabelas em uma consulta unica.</a:t>
+              <a:t>Lista todas as </a:t>
+            </a:r>
+            <a:r>
+              <a:rPr lang="en-US" sz="1100" dirty="0" err="1">
+                <a:solidFill>
+                  <a:srgbClr val="1E293B"/>
+                </a:solidFill>
+                <a:latin typeface="Calibri" pitchFamily="34" charset="0"/>
+                <a:ea typeface="Calibri" pitchFamily="34" charset="-122"/>
+                <a:cs typeface="Calibri" pitchFamily="34" charset="-120"/>
+              </a:rPr>
+              <a:t>internações</a:t>
+            </a:r>
+            <a:r>
+              <a:rPr lang="en-US" sz="1100" dirty="0">
+                <a:solidFill>
+                  <a:srgbClr val="1E293B"/>
+                </a:solidFill>
+                <a:latin typeface="Calibri" pitchFamily="34" charset="0"/>
+                <a:ea typeface="Calibri" pitchFamily="34" charset="-122"/>
+                <a:cs typeface="Calibri" pitchFamily="34" charset="-120"/>
+              </a:rPr>
+              <a:t> em andamento (data_saida IS NULL) com nome do paciente, medico, especialidade, leito, quarto e andar — JOIN de 5 tabelas em uma consulta </a:t>
+            </a:r>
+            <a:r>
+              <a:rPr lang="en-US" sz="1100" dirty="0" err="1">
+                <a:solidFill>
+                  <a:srgbClr val="1E293B"/>
+                </a:solidFill>
+                <a:latin typeface="Calibri" pitchFamily="34" charset="0"/>
+                <a:ea typeface="Calibri" pitchFamily="34" charset="-122"/>
+                <a:cs typeface="Calibri" pitchFamily="34" charset="-120"/>
+              </a:rPr>
+              <a:t>única</a:t>
+            </a:r>
+            <a:r>
+              <a:rPr lang="en-US" sz="1100" dirty="0">
+                <a:solidFill>
+                  <a:srgbClr val="1E293B"/>
+                </a:solidFill>
+                <a:latin typeface="Calibri" pitchFamily="34" charset="0"/>
+                <a:ea typeface="Calibri" pitchFamily="34" charset="-122"/>
+                <a:cs typeface="Calibri" pitchFamily="34" charset="-120"/>
+              </a:rPr>
+              <a:t>.</a:t>
             </a:r>
             <a:endParaRPr lang="en-US" sz="1100" dirty="0"/>
           </a:p>
@@ -4506,7 +4660,29 @@
                 <a:ea typeface="Calibri" pitchFamily="34" charset="-122"/>
                 <a:cs typeface="Calibri" pitchFamily="34" charset="-120"/>
               </a:rPr>
-              <a:t>Recebe (codp, codm, codl, motivo). Valida se o leito esta disponivel, insere o registro de internacao e atualiza o status do leito para ocupado em uma unica </a:t>
+              <a:t>Recebe (codp, codm, codl, motivo). Valida se o leito esta disponivel, insere o registro de </a:t>
+            </a:r>
+            <a:r>
+              <a:rPr lang="en-US" sz="1100" dirty="0" err="1">
+                <a:solidFill>
+                  <a:srgbClr val="1E293B"/>
+                </a:solidFill>
+                <a:latin typeface="Calibri" pitchFamily="34" charset="0"/>
+                <a:ea typeface="Calibri" pitchFamily="34" charset="-122"/>
+                <a:cs typeface="Calibri" pitchFamily="34" charset="-120"/>
+              </a:rPr>
+              <a:t>internação</a:t>
+            </a:r>
+            <a:r>
+              <a:rPr lang="en-US" sz="1100" dirty="0">
+                <a:solidFill>
+                  <a:srgbClr val="1E293B"/>
+                </a:solidFill>
+                <a:latin typeface="Calibri" pitchFamily="34" charset="0"/>
+                <a:ea typeface="Calibri" pitchFamily="34" charset="-122"/>
+                <a:cs typeface="Calibri" pitchFamily="34" charset="-120"/>
+              </a:rPr>
+              <a:t> e atualiza o status do leito para ocupado em uma unica </a:t>
             </a:r>
             <a:r>
               <a:rPr lang="en-US" sz="1100" dirty="0" err="1">
@@ -4699,7 +4875,51 @@
                 <a:ea typeface="Calibri" pitchFamily="34" charset="-122"/>
                 <a:cs typeface="Calibri" pitchFamily="34" charset="-120"/>
               </a:rPr>
-              <a:t>Disparada AFTER UPDATE em internacoes. Quando data_saida e preenchida (alta do paciente), libera automaticamente o leito mudando o status para disponivel.</a:t>
+              <a:t>Disparada AFTER UPDATE </a:t>
+            </a:r>
+            <a:r>
+              <a:rPr lang="en-US" sz="1100" dirty="0" err="1">
+                <a:solidFill>
+                  <a:srgbClr val="1E293B"/>
+                </a:solidFill>
+                <a:latin typeface="Calibri" pitchFamily="34" charset="0"/>
+                <a:ea typeface="Calibri" pitchFamily="34" charset="-122"/>
+                <a:cs typeface="Calibri" pitchFamily="34" charset="-120"/>
+              </a:rPr>
+              <a:t>em</a:t>
+            </a:r>
+            <a:r>
+              <a:rPr lang="en-US" sz="1100" dirty="0">
+                <a:solidFill>
+                  <a:srgbClr val="1E293B"/>
+                </a:solidFill>
+                <a:latin typeface="Calibri" pitchFamily="34" charset="0"/>
+                <a:ea typeface="Calibri" pitchFamily="34" charset="-122"/>
+                <a:cs typeface="Calibri" pitchFamily="34" charset="-120"/>
+              </a:rPr>
+              <a:t> </a:t>
+            </a:r>
+            <a:r>
+              <a:rPr lang="en-US" sz="1100" dirty="0" err="1">
+                <a:solidFill>
+                  <a:srgbClr val="1E293B"/>
+                </a:solidFill>
+                <a:latin typeface="Calibri" pitchFamily="34" charset="0"/>
+                <a:ea typeface="Calibri" pitchFamily="34" charset="-122"/>
+                <a:cs typeface="Calibri" pitchFamily="34" charset="-120"/>
+              </a:rPr>
+              <a:t>internações</a:t>
+            </a:r>
+            <a:r>
+              <a:rPr lang="en-US" sz="1100" dirty="0">
+                <a:solidFill>
+                  <a:srgbClr val="1E293B"/>
+                </a:solidFill>
+                <a:latin typeface="Calibri" pitchFamily="34" charset="0"/>
+                <a:ea typeface="Calibri" pitchFamily="34" charset="-122"/>
+                <a:cs typeface="Calibri" pitchFamily="34" charset="-120"/>
+              </a:rPr>
+              <a:t>. Quando data_saida e preenchida (alta do paciente), libera automaticamente o leito mudando o status para disponivel.</a:t>
             </a:r>
             <a:endParaRPr lang="en-US" sz="1100" dirty="0"/>
           </a:p>
@@ -4890,7 +5110,7 @@
         </p:nvSpPr>
         <p:spPr>
           <a:xfrm>
-            <a:off x="548640" y="1463040"/>
+            <a:off x="548640" y="1723813"/>
             <a:ext cx="640080" cy="640080"/>
           </a:xfrm>
           <a:prstGeom prst="ellipse">
@@ -4915,7 +5135,7 @@
         </p:nvSpPr>
         <p:spPr>
           <a:xfrm>
-            <a:off x="548640" y="1463040"/>
+            <a:off x="548640" y="1737360"/>
             <a:ext cx="640080" cy="640080"/>
           </a:xfrm>
           <a:prstGeom prst="rect">
@@ -5070,7 +5290,7 @@
         </p:nvSpPr>
         <p:spPr>
           <a:xfrm>
-            <a:off x="548640" y="2606040"/>
+            <a:off x="548640" y="2880360"/>
             <a:ext cx="640080" cy="640080"/>
           </a:xfrm>
           <a:prstGeom prst="ellipse">
@@ -5095,7 +5315,7 @@
         </p:nvSpPr>
         <p:spPr>
           <a:xfrm>
-            <a:off x="548640" y="2606040"/>
+            <a:off x="548640" y="2880360"/>
             <a:ext cx="640080" cy="640080"/>
           </a:xfrm>
           <a:prstGeom prst="rect">
@@ -5239,7 +5459,7 @@
         </p:nvSpPr>
         <p:spPr>
           <a:xfrm>
-            <a:off x="548640" y="3749040"/>
+            <a:off x="548640" y="4023360"/>
             <a:ext cx="640080" cy="640080"/>
           </a:xfrm>
           <a:prstGeom prst="ellipse">
@@ -5264,7 +5484,7 @@
         </p:nvSpPr>
         <p:spPr>
           <a:xfrm>
-            <a:off x="548640" y="3749040"/>
+            <a:off x="548640" y="4023360"/>
             <a:ext cx="640080" cy="640080"/>
           </a:xfrm>
           <a:prstGeom prst="rect">
